--- a/AI_Agents_and_Advanced_Fine_Tuning_Bootcamp/Slides/Week_04_prompt_engineering_and_optimization.pptx
+++ b/AI_Agents_and_Advanced_Fine_Tuning_Bootcamp/Slides/Week_04_prompt_engineering_and_optimization.pptx
@@ -3290,7 +3290,7 @@
                 </a:solidFill>
                 <a:latin typeface="Calibri"/>
               </a:rPr>
-              <a:t>From CO-STAR to DSPy, GEPA, TextGrad, and ORPO</a:t>
+              <a:t>From CO-STAR to DSPy, GEPA, TextGrad, and OPRO</a:t>
             </a:r>
           </a:p>
         </p:txBody>
@@ -3325,7 +3325,7 @@
                 </a:solidFill>
                 <a:latin typeface="Calibri"/>
               </a:rPr>
-              <a:t>Sunday, June 28, 2026</a:t>
+              <a:t>Sunday, October 25, 2026</a:t>
             </a:r>
           </a:p>
         </p:txBody>
@@ -3704,7 +3704,7 @@
                 </a:solidFill>
                 <a:latin typeface="Calibri"/>
               </a:rPr>
-              <a:t>6. GEPA, TextGrad, and ORPO</a:t>
+              <a:t>6. Prompt optimizers: GEPA, TextGrad, OPRO</a:t>
             </a:r>
           </a:p>
         </p:txBody>
@@ -3743,7 +3743,7 @@
                 </a:solidFill>
                 <a:latin typeface="Calibri"/>
               </a:rPr>
-              <a:t>  •  GEPA is genetic with reflection. TextGrad treats text as a tensor and uses a critic LLM as the gradient. ORPO unifies preference optimization with reference-free training. Each fits a different stage.</a:t>
+              <a:t>  •  GEPA is genetic with reflection. TextGrad treats text as a tensor and uses a critic LLM as the gradient. OPRO uses an LLM as the optimizer: it reads the trajectory of prior prompts and their scores, then proposes better prompts. Each fits a different stage. Do not confuse OPRO with ORPO, which unifies preference optimization with reference-free training; ORPO is a preference fine-tuning method (weights, not prompts) and pairs with DPO in Week 6.</a:t>
             </a:r>
           </a:p>
         </p:txBody>
@@ -5349,7 +5349,7 @@
                 </a:solidFill>
                 <a:latin typeface="Calibri"/>
               </a:rPr>
-              <a:t>6. Evolutionary methods: GEPA, TextGrad, ORPO</a:t>
+              <a:t>6. Prompt optimizers: GEPA, TextGrad, OPRO</a:t>
             </a:r>
           </a:p>
         </p:txBody>
@@ -5388,7 +5388,7 @@
                 </a:solidFill>
                 <a:latin typeface="Calibri"/>
               </a:rPr>
-              <a:t>  •  GEPA is genetic with reflection: an LLM critiques each candidate before mutation. TextGrad treats text as a tensor and uses a critic LLM as the gradient. ORPO unifies preference optimization with reference-free training. Each fits a different stage of the lifecycle: GEPA for exploration, TextGrad for refinement, ORPO for direct preference data.</a:t>
+              <a:t>  •  GEPA is genetic with reflection: an LLM critiques each candidate before mutation. TextGrad treats text as a tensor and uses a critic LLM as the gradient. OPRO uses an LLM as the optimizer: it reads the trajectory of prior prompts and their scores, then proposes better prompts. Each fits a different stage of the lifecycle: GEPA for exploration, TextGrad for refinement, OPRO for iterative scored search. A note on naming: ORPO unifies preference optimization with reference-free training, but ORPO itself is a preference fine-tuning method (weights, not prompts); it pairs with DPO in Week 6.</a:t>
             </a:r>
           </a:p>
         </p:txBody>
@@ -7364,7 +7364,7 @@
                 </a:solidFill>
                 <a:latin typeface="Calibri"/>
               </a:rPr>
-              <a:t>  •  Prompts are programs. Move from hand-crafted prompting (CO-STAR, few-shot, hallucination mitigation) to optimization frameworks that search prompt space programmatically. Cover DSPy with COPRO and MIPRO, then evolutionary approaches (GEPA, TextGrad, ORPO).</a:t>
+              <a:t>  •  Prompts are programs. Move from hand-crafted prompting (CO-STAR, few-shot, hallucination mitigation) to optimization frameworks that search prompt space programmatically. Cover DSPy with COPRO and MIPRO, then prompt optimizers that search a larger space (GEPA, TextGrad, OPRO).</a:t>
             </a:r>
           </a:p>
         </p:txBody>
